--- a/research_output.pptx
+++ b/research_output.pptx
@@ -3111,7 +3111,7 @@
           <a:lstStyle/>
           <a:p>
             <a:r>
-              <a:t>Waves in Physics</a:t>
+              <a:t>Waves in Physics: A Dynamic Journey</a:t>
             </a:r>
           </a:p>
         </p:txBody>
@@ -3132,7 +3132,7 @@
           <a:lstStyle/>
           <a:p>
             <a:r>
-              <a:t>Exploring energy, motion, and applications of waves</a:t>
+              <a:t>From Sound to Space: Understanding Wave Phenomena</a:t>
             </a:r>
           </a:p>
         </p:txBody>
@@ -3171,7 +3171,7 @@
           <a:lstStyle/>
           <a:p>
             <a:r>
-              <a:t>What is a Wave?</a:t>
+              <a:t>What Is a Wave?</a:t>
             </a:r>
           </a:p>
         </p:txBody>
@@ -3195,7 +3195,7 @@
               <a:defRPr sz="2000"/>
             </a:pPr>
             <a:r>
-              <a:t>Disturbance that transfers energy through a medium.</a:t>
+              <a:t>Disturbance that moves energy without permanently moving matter.</a:t>
             </a:r>
           </a:p>
           <a:p>
@@ -3203,7 +3203,15 @@
               <a:defRPr sz="2000"/>
             </a:pPr>
             <a:r>
-              <a:t>Moves energy from one place to another.</a:t>
+              <a:t>Organized propagation of disturbances.</a:t>
+            </a:r>
+          </a:p>
+          <a:p>
+            <a:pPr>
+              <a:defRPr sz="2000"/>
+            </a:pPr>
+            <a:r>
+              <a:t>Energy travels from one place to another.</a:t>
             </a:r>
           </a:p>
         </p:txBody>
@@ -3242,7 +3250,7 @@
           <a:lstStyle/>
           <a:p>
             <a:r>
-              <a:t>Wave Classifications</a:t>
+              <a:t>Types of Waves</a:t>
             </a:r>
           </a:p>
         </p:txBody>
@@ -3266,7 +3274,7 @@
               <a:defRPr sz="2000"/>
             </a:pPr>
             <a:r>
-              <a:t>Transverse – particles move perpendicular.</a:t>
+              <a:t>Mechanical (sound) needs a medium.</a:t>
             </a:r>
           </a:p>
           <a:p>
@@ -3274,7 +3282,7 @@
               <a:defRPr sz="2000"/>
             </a:pPr>
             <a:r>
-              <a:t>Longitudinal – particles move parallel.</a:t>
+              <a:t>Electromagnetic (light) travels through vacuum.</a:t>
             </a:r>
           </a:p>
           <a:p>
@@ -3282,7 +3290,7 @@
               <a:defRPr sz="2000"/>
             </a:pPr>
             <a:r>
-              <a:t>Surface, electromagnetic, mechanical.</a:t>
+              <a:t>Surface, seismic, and gravitational also exist.</a:t>
             </a:r>
           </a:p>
         </p:txBody>
@@ -3321,7 +3329,7 @@
           <a:lstStyle/>
           <a:p>
             <a:r>
-              <a:t>Mechanical vs Electromagnetic</a:t>
+              <a:t>Transverse vs Longitudinal</a:t>
             </a:r>
           </a:p>
         </p:txBody>
@@ -3345,7 +3353,7 @@
               <a:defRPr sz="2000"/>
             </a:pPr>
             <a:r>
-              <a:t>Mechanical needs a medium.</a:t>
+              <a:t>Transverse: particles move perpendicular to wave direction, forming crests and troughs.</a:t>
             </a:r>
           </a:p>
           <a:p>
@@ -3353,15 +3361,7 @@
               <a:defRPr sz="2000"/>
             </a:pPr>
             <a:r>
-              <a:t>Electromagnetic travels through vacuum.</a:t>
-            </a:r>
-          </a:p>
-          <a:p>
-            <a:pPr>
-              <a:defRPr sz="2000"/>
-            </a:pPr>
-            <a:r>
-              <a:t>Examples: light, radio, microwaves.</a:t>
+              <a:t>Longitudinal: particles move parallel, creating compressions and rarefactions.</a:t>
             </a:r>
           </a:p>
         </p:txBody>
@@ -3400,7 +3400,7 @@
           <a:lstStyle/>
           <a:p>
             <a:r>
-              <a:t>Seismic Waves</a:t>
+              <a:t>Seismic Waves in Earth</a:t>
             </a:r>
           </a:p>
         </p:txBody>
@@ -3424,7 +3424,7 @@
               <a:defRPr sz="2000"/>
             </a:pPr>
             <a:r>
-              <a:t>P-waves: longitudinal, fastest.</a:t>
+              <a:t>P‑waves: primary, longitudinal, travel fastest through solids.</a:t>
             </a:r>
           </a:p>
           <a:p>
@@ -3432,7 +3432,7 @@
               <a:defRPr sz="2000"/>
             </a:pPr>
             <a:r>
-              <a:t>S-waves: transverse, slower.</a:t>
+              <a:t>S‑waves: secondary, transverse, travel slower, can't cross liquids.</a:t>
             </a:r>
           </a:p>
           <a:p>
@@ -3440,7 +3440,7 @@
               <a:defRPr sz="2000"/>
             </a:pPr>
             <a:r>
-              <a:t>Reveal Earth's interior structure.</a:t>
+              <a:t>Reveal Earth's core is liquid, mantle is solid.</a:t>
             </a:r>
           </a:p>
         </p:txBody>
@@ -3479,7 +3479,7 @@
           <a:lstStyle/>
           <a:p>
             <a:r>
-              <a:t>Key Wave Properties</a:t>
+              <a:t>Quantum Wave Behavior</a:t>
             </a:r>
           </a:p>
         </p:txBody>
@@ -3503,7 +3503,7 @@
               <a:defRPr sz="2000"/>
             </a:pPr>
             <a:r>
-              <a:t>Amplitude: maximum displacement.</a:t>
+              <a:t>Particles exhibit wavelike interference and diffraction.</a:t>
             </a:r>
           </a:p>
           <a:p>
@@ -3511,7 +3511,7 @@
               <a:defRPr sz="2000"/>
             </a:pPr>
             <a:r>
-              <a:t>Frequency: cycles per second.</a:t>
+              <a:t>Quantum mechanics treats particles as wavefunctions.</a:t>
             </a:r>
           </a:p>
           <a:p>
@@ -3519,15 +3519,7 @@
               <a:defRPr sz="2000"/>
             </a:pPr>
             <a:r>
-              <a:t>Wavelength: distance between crests.</a:t>
-            </a:r>
-          </a:p>
-          <a:p>
-            <a:pPr>
-              <a:defRPr sz="2000"/>
-            </a:pPr>
-            <a:r>
-              <a:t>Speed: medium dependent.</a:t>
+              <a:t>Wave‑particle duality fundamental to modern physics.</a:t>
             </a:r>
           </a:p>
         </p:txBody>
@@ -3566,7 +3558,7 @@
           <a:lstStyle/>
           <a:p>
             <a:r>
-              <a:t>Applications of Waves</a:t>
+              <a:t>Everyday Applications</a:t>
             </a:r>
           </a:p>
         </p:txBody>
@@ -3590,7 +3582,7 @@
               <a:defRPr sz="2000"/>
             </a:pPr>
             <a:r>
-              <a:t>Sound: mechanical wave.</a:t>
+              <a:t>Sound for communication, music, and sonar.</a:t>
             </a:r>
           </a:p>
           <a:p>
@@ -3598,7 +3590,7 @@
               <a:defRPr sz="2000"/>
             </a:pPr>
             <a:r>
-              <a:t>Radio, TV, WiFi: electromagnetic.</a:t>
+              <a:t>Light enables vision, photography, and fiber optics.</a:t>
             </a:r>
           </a:p>
           <a:p>
@@ -3606,7 +3598,7 @@
               <a:defRPr sz="2000"/>
             </a:pPr>
             <a:r>
-              <a:t>Seismology studies Earth's interior.</a:t>
+              <a:t>Radio waves power broadcasts, Wi-Fi, and GPS.</a:t>
             </a:r>
           </a:p>
           <a:p>
@@ -3614,7 +3606,7 @@
               <a:defRPr sz="2000"/>
             </a:pPr>
             <a:r>
-              <a:t>Water waves illustrate fundamentals.</a:t>
+              <a:t>Seismic waves probe Earth's interior.</a:t>
             </a:r>
           </a:p>
         </p:txBody>
@@ -3653,7 +3645,7 @@
           <a:lstStyle/>
           <a:p>
             <a:r>
-              <a:t>Challenges in Wave Science</a:t>
+              <a:t>Challenges &amp; Future</a:t>
             </a:r>
           </a:p>
         </p:txBody>
@@ -3677,7 +3669,7 @@
               <a:defRPr sz="2000"/>
             </a:pPr>
             <a:r>
-              <a:t>Modeling waves in composite materials.</a:t>
+              <a:t>Mechanical waves limited to media, cannot travel in vacuum.</a:t>
             </a:r>
           </a:p>
           <a:p>
@@ -3685,7 +3677,7 @@
               <a:defRPr sz="2000"/>
             </a:pPr>
             <a:r>
-              <a:t>Predicting propagation in heterogeneous media.</a:t>
+              <a:t>Electromagnetic waves absorbed or reflected by materials.</a:t>
             </a:r>
           </a:p>
           <a:p>
@@ -3693,7 +3685,15 @@
               <a:defRPr sz="2000"/>
             </a:pPr>
             <a:r>
-              <a:t>Complex interactions remain difficult.</a:t>
+              <a:t>Gravitational waves open new astronomy.</a:t>
+            </a:r>
+          </a:p>
+          <a:p>
+            <a:pPr>
+              <a:defRPr sz="2000"/>
+            </a:pPr>
+            <a:r>
+              <a:t>New materials improve radar and communications.</a:t>
             </a:r>
           </a:p>
         </p:txBody>
